--- a/docs/presentations/01-fundament-llm-rag.pptx
+++ b/docs/presentations/01-fundament-llm-rag.pptx
@@ -528,7 +528,7 @@
           <a:p>
             <a:r>
               <a:rPr lang="en-US" dirty="0"/>
-              <a:t>Это первая из шести частей учебного цикла по платформе. Цель части 1 — дать прочный концептуальный фундамент: что такое LLM и RAG, из каких шагов состоит пайплайн поиска и генерации ответа, и где в этом пайплайне встроена защита данных. Все последующие части (2–6) будут опираться на термины и схему, введённые здесь, поэтому имеет смысл изучать материал не бегло, а вдумчиво, при необходимости возвращаясь к глоссарию (слайд 23) и итоговой схеме (слайд 22). Материал построен на собственной документации проекта — онбординге и базе знаний по платформе — а не только на общих представлениях об ИИ.</a:t>
+              <a:t>Это первая из пяти частей учебного цикла по платформе. Цель части 1 — дать прочный концептуальный фундамент: что такое LLM и RAG, из каких шагов состоит пайплайн поиска и генерации ответа, и где в этом пайплайне встроена защита данных. Все последующие части (2–5) будут опираться на термины и схему, введённые здесь, поэтому имеет смысл изучать материал не бегло, а вдумчиво, при необходимости возвращаясь к глоссарию (слайд 23) и итоговой схеме (слайд 22). Материал построен на собственной документации проекта — онбординге и базе знаний по платформе — а не только на общих представлениях об ИИ.</a:t>
             </a:r>
             <a:endParaRPr lang="en-US" dirty="0"/>
           </a:p>
